--- a/2026-B/ingenieria-desarrollo-movil/unidad-03/slides/unidad03calidad-release.pptx
+++ b/2026-B/ingenieria-desarrollo-movil/unidad-03/slides/unidad03calidad-release.pptx
@@ -1331,7 +1331,7 @@
           <a:lstStyle/>
           <a:p>
             <a:r>
-              <a:t>EN VIVO · Encuentro 3, y se retoma al abrir el Encuentro 4. Leer en clave de capacidad. Aclarar qué es este documento: material de apoyo de la unidad completa, no el guion de la hora; en cada encuentro se proyecta una parte y el resto queda para estudiar. Meet de ambos encuentros: meet.google.com/pzh-kxer-pnx. El Encuentro 3 incluye la clínica de la A2 (vence el domingo 25 de octubre); el Encuentro 4, la clínica de la A3. En el proyecto ABP esta unidad responde a dos mínimos: (7) dos plugins nativos como adaptadores de un puerto, con permisos just-in-time, y (8) pruebas unitarias de casos de uso y state holders + AAB/APK firmado + checklist de release. Las plantillas de 04 y 05 están en «Plantillas del proyecto» y los hitos en la «Guía ABP», ambas en el aula. RECORRIDO EN VIVO (numeración del pie). Encuentro 3: 1, 2, 4, 5, 7, 9, 10, 14, 15, 16, 17, 19, 21, 22; si sobra tiempo, 20. Encuentro 4: 2 (repaso de ruta), 24, 26, 27, 28, 30, 31, 33, 36, 37, 38, 41, 42, 43, 44, 45. Todo lo demás es CONSULTA: se señala y se deja para estudiar.</a:t>
+              <a:t>EN VIVO · Encuentro 3, y se retoma al abrir el Encuentro 4. Leer en clave de capacidad. Aclarar qué es este documento: material de apoyo de la unidad completa, no el guion de la hora; en cada encuentro se proyecta una parte y el resto queda para estudiar. Meet de ambos encuentros: meet.google.com/pzh-kxer-pnx. El Encuentro 3 incluye la clínica de la A2 (vence el domingo 25 de octubre); el Encuentro 4, la clínica de la A3. En el proyecto de aula esta unidad responde a dos mínimos: (7) dos plugins nativos como adaptadores de un puerto, con permisos just-in-time, y (8) pruebas unitarias de casos de uso y state holders + AAB/APK firmado + checklist de release. Las plantillas de 04 y 05 están en «Plantillas del proyecto» y los hitos en la «Guía del proyecto de aula», ambas en el aula. RECORRIDO EN VIVO (numeración del pie). Encuentro 3: 1, 2, 4, 5, 7, 9, 10, 14, 15, 16, 17, 19, 21, 22; si sobra tiempo, 20. Encuentro 4: 2 (repaso de ruta), 24, 26, 27, 28, 30, 31, 33, 36, 37, 38, 41, 42, 43, 44, 45. Todo lo demás es CONSULTA: se señala y se deja para estudiar.</a:t>
             </a:r>
           </a:p>
         </p:txBody>
@@ -3291,7 +3291,7 @@
           <a:lstStyle/>
           <a:p>
             <a:r>
-              <a:t>EN VIVO · Encuentro 4 (cierre). La frase de la unidad: la calidad y la entrega también se diseñan. Los plugins entran por puertos, los permisos se piden cuando tienen sentido, la seguridad parte de que el binario es público, el rendimiento tiene números, las pruebas no necesitan un teléfono y el release es una cadena de identidades custodiadas que termina en observación. ACTIVIDAD: para H3 (domingo 1 de noviembre, 11:59 p. m.), la memoria técnica muestra estas decisiones con evidencia: estrategia de pruebas con cobertura por carpeta, checklist de seguridad, firma y binario, pipeline (real o diseñado) y cómo se observará la app publicada. Para el Documento ABP (domingo 8 de noviembre), las secciones 04 y 05 del marco quedan diligenciadas con esa misma evidencia, usando las Plantillas del proyecto y su lista de verificación de release. FUENTES. Material institucional: Corporación Universitaria del Huila (2026), Unidad de aprendizaje 3: Funcionalidades nativas, pruebas y despliegue [PDF], aula virtual; Clase digital 3 en Moodle; marco de gobierno móvil del curso, reglas de seguridad (00), Calidad (04) y Release (05). Bibliografía de la clase digital: Capacitor Documentation (capacitorjs.com/docs); Ionic CLI Documentation; Google Developers, Publishing with Android App Bundles; Apple Developer, Distribute — App Store; Angular, Testing in Angular; AppFlow by Ionic; Fastlane Tools; Firebase Test Lab; Expo EAS Build; Jest y Vue Test Utils (otros stacks); Sommerville (2011), Ingeniería de software; Aguilar (2020), Fundamentos de programación Plus; Pressman y Maxim (2021), Ingeniería de Software Plus, en la biblioteca digital de CORHUILA. Complementarias: OWASP MASVS; Meszaros (2007), xUnit Test Patterns; Cockburn (2005), Hexagonal Architecture.</a:t>
+              <a:t>EN VIVO · Encuentro 4 (cierre). La frase de la unidad: la calidad y la entrega también se diseñan. Los plugins entran por puertos, los permisos se piden cuando tienen sentido, la seguridad parte de que el binario es público, el rendimiento tiene números, las pruebas no necesitan un teléfono y el release es una cadena de identidades custodiadas que termina en observación. ACTIVIDAD: para H3 (domingo 1 de noviembre, 11:59 p. m.), la memoria técnica muestra estas decisiones con evidencia: estrategia de pruebas con cobertura por carpeta, checklist de seguridad, firma y binario, pipeline (real o diseñado) y cómo se observará la app publicada. Para la entrega final del proyecto de aula (domingo 8 de noviembre), cada pareja diligencia el Informe del proyecto de aula (FO-IV-159) y adjunta un .zip de anexos: las secciones 04 y 05 del marco quedan diligenciadas con esa misma evidencia en el documento técnico del marco 00–05 en PDF, usando las Plantillas del proyecto y su lista de verificación de release, junto con fotos y capturas, el repositorio, el AAB/APK firmado y el video. FUENTES. Material institucional: Corporación Universitaria del Huila (2026), Unidad de aprendizaje 3: Funcionalidades nativas, pruebas y despliegue [PDF], aula virtual; Clase digital 3 en Moodle; marco de gobierno móvil del curso, reglas de seguridad (00), Calidad (04) y Release (05). Bibliografía de la clase digital: Capacitor Documentation (capacitorjs.com/docs); Ionic CLI Documentation; Google Developers, Publishing with Android App Bundles; Apple Developer, Distribute — App Store; Angular, Testing in Angular; AppFlow by Ionic; Fastlane Tools; Firebase Test Lab; Expo EAS Build; Jest y Vue Test Utils (otros stacks); Sommerville (2011), Ingeniería de software; Aguilar (2020), Fundamentos de programación Plus; Pressman y Maxim (2021), Ingeniería de Software Plus, en la biblioteca digital de CORHUILA. Complementarias: OWASP MASVS; Meszaros (2007), xUnit Test Patterns; Cockburn (2005), Hexagonal Architecture.</a:t>
             </a:r>
           </a:p>
         </p:txBody>
@@ -25591,7 +25591,7 @@
                 </a:solidFill>
                 <a:latin typeface="Aptos Display"/>
               </a:rPr>
-              <a:t>Encuentros de 6:00 a 7:00 p. m. por Meet · H3 (20 %): dom 1-nov, 11:59 p. m. · Documento ABP (40 %): dom 8-nov</a:t>
+              <a:t>Encuentros de 6:00 a 7:00 p. m. por Meet · H3 (20 %): dom 1-nov, 11:59 p. m. · Entrega final del proyecto de aula (40 %): dom 8-nov</a:t>
             </a:r>
           </a:p>
         </p:txBody>
@@ -45486,7 +45486,7 @@
                           </a:solidFill>
                           <a:latin typeface="Aptos"/>
                         </a:rPr>
-                        <a:t>GitHub Actions u otro CI</a:t>
+                        <a:t>Servicio de CI (Actions, GitLab CI…)</a:t>
                       </a:r>
                     </a:p>
                   </a:txBody>
@@ -49573,7 +49573,7 @@
                 </a:solidFill>
                 <a:latin typeface="Aptos"/>
               </a:rPr>
-              <a:t>Lo que se lleva a H3 y al Documento ABP</a:t>
+              <a:t>Lo que se lleva a H3 y a la entrega final</a:t>
             </a:r>
           </a:p>
         </p:txBody>
@@ -50833,7 +50833,7 @@
                 </a:solidFill>
                 <a:latin typeface="Aptos Display"/>
               </a:rPr>
-              <a:t>H3 (dom 1-nov): app desplegada + memoria con 04 Calidad y 05 Release. Documento ABP (dom 8-nov): marco 00–05 con evidencia.</a:t>
+              <a:t>H3 (dom 1-nov): app desplegada + memoria con 04 Calidad y 05 Release. Entrega final (dom 8-nov): Informe FO-IV-159 + anexos.</a:t>
             </a:r>
           </a:p>
         </p:txBody>
